--- a/3-clang-llvm/lec12-llvm-ir-v5.pptx
+++ b/3-clang-llvm/lec12-llvm-ir-v5.pptx
@@ -249,7 +249,7 @@
           <a:p>
             <a:fld id="{C7FD2924-D280-4505-BAC6-AD9B19A15CC3}" type="datetimeFigureOut">
               <a:rPr lang="ko-KR" altLang="en-US" smtClean="0"/>
-              <a:t>2026-09-22</a:t>
+              <a:t>2026-10-21</a:t>
             </a:fld>
             <a:endParaRPr lang="ko-KR" altLang="en-US"/>
           </a:p>
@@ -964,7 +964,7 @@
           <a:p>
             <a:fld id="{D6A4030A-28C9-4AA6-9564-7355F2F06A57}" type="datetime1">
               <a:rPr lang="ko-KR" altLang="en-US" smtClean="0"/>
-              <a:t>2026-09-22</a:t>
+              <a:t>2026-10-21</a:t>
             </a:fld>
             <a:endParaRPr lang="ko-KR" altLang="en-US"/>
           </a:p>
@@ -1090,7 +1090,7 @@
           <a:p>
             <a:fld id="{93642A64-17FC-4D1B-A4C5-869316C2C141}" type="datetime1">
               <a:rPr lang="ko-KR" altLang="en-US" smtClean="0"/>
-              <a:t>2026-09-22</a:t>
+              <a:t>2026-10-21</a:t>
             </a:fld>
             <a:endParaRPr lang="ko-KR" altLang="en-US"/>
           </a:p>
@@ -1272,7 +1272,7 @@
           <a:p>
             <a:fld id="{1B02FC80-6EA7-47D6-BABE-A62610B56D28}" type="datetime1">
               <a:rPr lang="ko-KR" altLang="en-US" smtClean="0"/>
-              <a:t>2026-09-22</a:t>
+              <a:t>2026-10-21</a:t>
             </a:fld>
             <a:endParaRPr lang="ko-KR" altLang="en-US"/>
           </a:p>
@@ -1534,7 +1534,7 @@
                   </a:prstClr>
                 </a:solidFill>
               </a:rPr>
-              <a:t>2026-09-22</a:t>
+              <a:t>2026-10-21</a:t>
             </a:fld>
             <a:endParaRPr lang="ko-KR" altLang="en-US">
               <a:solidFill>
@@ -1889,7 +1889,7 @@
                   </a:prstClr>
                 </a:solidFill>
               </a:rPr>
-              <a:t>2026-09-22</a:t>
+              <a:t>2026-10-21</a:t>
             </a:fld>
             <a:endParaRPr lang="ko-KR" altLang="en-US">
               <a:solidFill>
@@ -2256,7 +2256,7 @@
                   </a:prstClr>
                 </a:solidFill>
               </a:rPr>
-              <a:t>2026-09-22</a:t>
+              <a:t>2026-10-21</a:t>
             </a:fld>
             <a:endParaRPr lang="ko-KR" altLang="en-US">
               <a:solidFill>
@@ -2454,7 +2454,7 @@
                   </a:prstClr>
                 </a:solidFill>
               </a:rPr>
-              <a:t>2026-09-22</a:t>
+              <a:t>2026-10-21</a:t>
             </a:fld>
             <a:endParaRPr lang="ko-KR" altLang="en-US">
               <a:solidFill>
@@ -2630,7 +2630,7 @@
                   </a:prstClr>
                 </a:solidFill>
               </a:rPr>
-              <a:t>2026-09-22</a:t>
+              <a:t>2026-10-21</a:t>
             </a:fld>
             <a:endParaRPr lang="ko-KR" altLang="en-US">
               <a:solidFill>
@@ -2917,7 +2917,7 @@
                   </a:prstClr>
                 </a:solidFill>
               </a:rPr>
-              <a:t>2026-09-22</a:t>
+              <a:t>2026-10-21</a:t>
             </a:fld>
             <a:endParaRPr lang="en-US" altLang="ko-KR">
               <a:solidFill>
@@ -3144,7 +3144,7 @@
           <a:p>
             <a:fld id="{5972FA16-56DC-42C5-8299-62A03231F761}" type="datetime1">
               <a:rPr lang="ko-KR" altLang="en-US" smtClean="0"/>
-              <a:t>2026-09-22</a:t>
+              <a:t>2026-10-21</a:t>
             </a:fld>
             <a:endParaRPr lang="ko-KR" altLang="en-US"/>
           </a:p>
@@ -3393,7 +3393,7 @@
           <a:p>
             <a:fld id="{D21905B7-D8F1-4AB2-815F-B5764F6CE49F}" type="datetime1">
               <a:rPr lang="ko-KR" altLang="en-US" smtClean="0"/>
-              <a:t>2026-09-22</a:t>
+              <a:t>2026-10-21</a:t>
             </a:fld>
             <a:endParaRPr lang="ko-KR" altLang="en-US"/>
           </a:p>
@@ -3682,7 +3682,7 @@
           <a:p>
             <a:fld id="{8E02A14C-B1E0-4FEF-A05F-72154AB14455}" type="datetime1">
               <a:rPr lang="ko-KR" altLang="en-US" smtClean="0"/>
-              <a:t>2026-09-22</a:t>
+              <a:t>2026-10-21</a:t>
             </a:fld>
             <a:endParaRPr lang="ko-KR" altLang="en-US"/>
           </a:p>
@@ -4105,7 +4105,7 @@
           <a:p>
             <a:fld id="{63886CA7-359E-4B5D-91F3-6B3B9A5EED81}" type="datetime1">
               <a:rPr lang="ko-KR" altLang="en-US" smtClean="0"/>
-              <a:t>2026-09-22</a:t>
+              <a:t>2026-10-21</a:t>
             </a:fld>
             <a:endParaRPr lang="ko-KR" altLang="en-US"/>
           </a:p>
@@ -4226,7 +4226,7 @@
           <a:p>
             <a:fld id="{16882C6A-3284-451C-BFBD-D3E6B47C2A82}" type="datetime1">
               <a:rPr lang="ko-KR" altLang="en-US" smtClean="0"/>
-              <a:t>2026-09-22</a:t>
+              <a:t>2026-10-21</a:t>
             </a:fld>
             <a:endParaRPr lang="ko-KR" altLang="en-US"/>
           </a:p>
@@ -4325,7 +4325,7 @@
           <a:p>
             <a:fld id="{F83C0B8E-6B5C-4492-A32D-82C93727986C}" type="datetime1">
               <a:rPr lang="ko-KR" altLang="en-US" smtClean="0"/>
-              <a:t>2026-09-22</a:t>
+              <a:t>2026-10-21</a:t>
             </a:fld>
             <a:endParaRPr lang="ko-KR" altLang="en-US"/>
           </a:p>
@@ -4604,7 +4604,7 @@
           <a:p>
             <a:fld id="{8973ABBB-793D-4587-9055-908626D07AE3}" type="datetime1">
               <a:rPr lang="ko-KR" altLang="en-US" smtClean="0"/>
-              <a:t>2026-09-22</a:t>
+              <a:t>2026-10-21</a:t>
             </a:fld>
             <a:endParaRPr lang="ko-KR" altLang="en-US"/>
           </a:p>
@@ -4863,7 +4863,7 @@
           <a:p>
             <a:fld id="{163126C1-F9FB-4935-B547-5805BAE95E9E}" type="datetime1">
               <a:rPr lang="ko-KR" altLang="en-US" smtClean="0"/>
-              <a:t>2026-09-22</a:t>
+              <a:t>2026-10-21</a:t>
             </a:fld>
             <a:endParaRPr lang="ko-KR" altLang="en-US"/>
           </a:p>
@@ -5079,7 +5079,7 @@
           <a:p>
             <a:fld id="{5DF68B58-71AB-438A-852A-D262459D036E}" type="datetime1">
               <a:rPr lang="ko-KR" altLang="en-US" smtClean="0"/>
-              <a:t>2026-09-22</a:t>
+              <a:t>2026-10-21</a:t>
             </a:fld>
             <a:endParaRPr lang="ko-KR" altLang="en-US"/>
           </a:p>
@@ -5634,7 +5634,7 @@
                   </a:prstClr>
                 </a:solidFill>
               </a:rPr>
-              <a:t>2026-09-22</a:t>
+              <a:t>2026-10-21</a:t>
             </a:fld>
             <a:endParaRPr lang="ko-KR" altLang="en-US">
               <a:solidFill>
@@ -6230,7 +6230,7 @@
           <a:p>
             <a:fld id="{C6807281-C594-49E1-931C-993FD6DEDE1F}" type="datetime1">
               <a:rPr lang="ko-KR" altLang="en-US" smtClean="0"/>
-              <a:t>2026-09-22</a:t>
+              <a:t>2026-10-21</a:t>
             </a:fld>
             <a:endParaRPr lang="ko-KR" altLang="en-US"/>
           </a:p>
@@ -6502,7 +6502,7 @@
           <a:p>
             <a:fld id="{AADC4C1D-8DC3-44B3-AE55-6B75A33AEA66}" type="datetime1">
               <a:rPr lang="ko-KR" altLang="en-US" smtClean="0"/>
-              <a:t>2026-09-22</a:t>
+              <a:t>2026-10-21</a:t>
             </a:fld>
             <a:endParaRPr lang="ko-KR" altLang="en-US"/>
           </a:p>
@@ -6675,7 +6675,7 @@
           <a:p>
             <a:fld id="{228B81D5-4EB3-4E53-82A3-627CC477DA58}" type="datetime1">
               <a:rPr lang="ko-KR" altLang="en-US" smtClean="0"/>
-              <a:t>2026-09-22</a:t>
+              <a:t>2026-10-21</a:t>
             </a:fld>
             <a:endParaRPr lang="ko-KR" altLang="en-US"/>
           </a:p>
@@ -7414,7 +7414,7 @@
                       <m:sSubPr>
                         <m:ctrlPr>
                           <a:rPr lang="en-US" altLang="ko-KR" sz="2000" b="0" i="1" smtClean="0">
-                            <a:latin typeface="Cambria Math"/>
+                            <a:latin typeface="Cambria Math" panose="02040503050406030204" pitchFamily="18" charset="0"/>
                           </a:rPr>
                         </m:ctrlPr>
                       </m:sSubPr>
@@ -7445,7 +7445,7 @@
                       <m:sSubPr>
                         <m:ctrlPr>
                           <a:rPr lang="en-US" altLang="ko-KR" sz="2000" b="0" i="1" smtClean="0">
-                            <a:latin typeface="Cambria Math"/>
+                            <a:latin typeface="Cambria Math" panose="02040503050406030204" pitchFamily="18" charset="0"/>
                           </a:rPr>
                         </m:ctrlPr>
                       </m:sSubPr>
@@ -7488,7 +7488,7 @@
                       <m:sSubPr>
                         <m:ctrlPr>
                           <a:rPr lang="en-US" altLang="ko-KR" sz="2000" b="0" i="1" smtClean="0">
-                            <a:latin typeface="Cambria Math"/>
+                            <a:latin typeface="Cambria Math" panose="02040503050406030204" pitchFamily="18" charset="0"/>
                           </a:rPr>
                         </m:ctrlPr>
                       </m:sSubPr>
@@ -7525,7 +7525,7 @@
                       <m:sSubPr>
                         <m:ctrlPr>
                           <a:rPr lang="en-US" altLang="ko-KR" sz="2000" i="1">
-                            <a:latin typeface="Cambria Math"/>
+                            <a:latin typeface="Cambria Math" panose="02040503050406030204" pitchFamily="18" charset="0"/>
                           </a:rPr>
                         </m:ctrlPr>
                       </m:sSubPr>
@@ -7624,7 +7624,7 @@
           <a:p>
             <a:fld id="{EBBB10FC-9C7E-448C-BCD2-92836878804D}" type="datetime1">
               <a:rPr lang="ko-KR" altLang="en-US" smtClean="0"/>
-              <a:t>2026-09-22</a:t>
+              <a:t>2026-10-21</a:t>
             </a:fld>
             <a:endParaRPr lang="ko-KR" altLang="en-US"/>
           </a:p>
@@ -8560,7 +8560,7 @@
           <a:p>
             <a:fld id="{361E60C5-5DE2-4F1D-A3CA-2B9C99772244}" type="datetime1">
               <a:rPr lang="ko-KR" altLang="en-US" smtClean="0"/>
-              <a:t>2026-09-22</a:t>
+              <a:t>2026-10-21</a:t>
             </a:fld>
             <a:endParaRPr lang="ko-KR" altLang="en-US"/>
           </a:p>
@@ -9019,7 +9019,7 @@
           <a:p>
             <a:fld id="{D18E14E7-2A19-42D3-9611-ED78C0C865B8}" type="datetime1">
               <a:rPr lang="ko-KR" altLang="en-US" smtClean="0"/>
-              <a:t>2026-09-22</a:t>
+              <a:t>2026-10-21</a:t>
             </a:fld>
             <a:endParaRPr lang="ko-KR" altLang="en-US"/>
           </a:p>
@@ -9280,7 +9280,7 @@
           <a:p>
             <a:fld id="{49D40FD3-2CBF-4CD1-9910-09BECA7471ED}" type="datetime1">
               <a:rPr lang="ko-KR" altLang="en-US" smtClean="0"/>
-              <a:t>2026-09-22</a:t>
+              <a:t>2026-10-21</a:t>
             </a:fld>
             <a:endParaRPr lang="ko-KR" altLang="en-US"/>
           </a:p>
@@ -9519,7 +9519,7 @@
           <a:p>
             <a:fld id="{A52D8E35-5020-4556-B7D5-014EC4FE70CC}" type="datetime1">
               <a:rPr lang="ko-KR" altLang="en-US" smtClean="0"/>
-              <a:t>2026-09-22</a:t>
+              <a:t>2026-10-21</a:t>
             </a:fld>
             <a:endParaRPr lang="ko-KR" altLang="en-US"/>
           </a:p>
@@ -9897,7 +9897,7 @@
           <a:p>
             <a:fld id="{69B23FFF-ADC3-4DBF-AD15-A00414FAE676}" type="datetime1">
               <a:rPr lang="ko-KR" altLang="en-US" smtClean="0"/>
-              <a:t>2026-09-22</a:t>
+              <a:t>2026-10-21</a:t>
             </a:fld>
             <a:endParaRPr lang="ko-KR" altLang="en-US"/>
           </a:p>
@@ -10145,7 +10145,7 @@
           <a:p>
             <a:fld id="{5972FA16-56DC-42C5-8299-62A03231F761}" type="datetime1">
               <a:rPr lang="ko-KR" altLang="en-US" smtClean="0"/>
-              <a:t>2026-09-22</a:t>
+              <a:t>2026-10-21</a:t>
             </a:fld>
             <a:endParaRPr lang="ko-KR" altLang="en-US"/>
           </a:p>
@@ -11354,7 +11354,7 @@
           <a:p>
             <a:fld id="{5972FA16-56DC-42C5-8299-62A03231F761}" type="datetime1">
               <a:rPr lang="ko-KR" altLang="en-US" smtClean="0"/>
-              <a:t>2026-09-22</a:t>
+              <a:t>2026-10-21</a:t>
             </a:fld>
             <a:endParaRPr lang="ko-KR" altLang="en-US"/>
           </a:p>
@@ -13147,7 +13147,7 @@
           <a:p>
             <a:fld id="{AED6A7DB-55D9-4729-85D7-E7D6C30D80C4}" type="datetime1">
               <a:rPr lang="ko-KR" altLang="en-US" smtClean="0"/>
-              <a:t>2026-09-22</a:t>
+              <a:t>2026-10-21</a:t>
             </a:fld>
             <a:endParaRPr lang="ko-KR" altLang="en-US"/>
           </a:p>
@@ -13711,7 +13711,7 @@
           <a:p>
             <a:fld id="{5972FA16-56DC-42C5-8299-62A03231F761}" type="datetime1">
               <a:rPr lang="ko-KR" altLang="en-US" smtClean="0"/>
-              <a:t>2026-09-22</a:t>
+              <a:t>2026-10-21</a:t>
             </a:fld>
             <a:endParaRPr lang="ko-KR" altLang="en-US"/>
           </a:p>
@@ -14698,7 +14698,7 @@
           <a:p>
             <a:fld id="{5972FA16-56DC-42C5-8299-62A03231F761}" type="datetime1">
               <a:rPr lang="ko-KR" altLang="en-US" smtClean="0"/>
-              <a:t>2026-09-22</a:t>
+              <a:t>2026-10-21</a:t>
             </a:fld>
             <a:endParaRPr lang="ko-KR" altLang="en-US"/>
           </a:p>
@@ -15134,7 +15134,7 @@
           <a:p>
             <a:fld id="{5972FA16-56DC-42C5-8299-62A03231F761}" type="datetime1">
               <a:rPr lang="ko-KR" altLang="en-US" smtClean="0"/>
-              <a:t>2026-09-22</a:t>
+              <a:t>2026-10-21</a:t>
             </a:fld>
             <a:endParaRPr lang="ko-KR" altLang="en-US"/>
           </a:p>
@@ -15639,7 +15639,7 @@
           <a:p>
             <a:fld id="{5972FA16-56DC-42C5-8299-62A03231F761}" type="datetime1">
               <a:rPr lang="ko-KR" altLang="en-US" smtClean="0"/>
-              <a:t>2026-09-22</a:t>
+              <a:t>2026-10-21</a:t>
             </a:fld>
             <a:endParaRPr lang="ko-KR" altLang="en-US"/>
           </a:p>
@@ -16006,7 +16006,7 @@
           <a:p>
             <a:fld id="{5972FA16-56DC-42C5-8299-62A03231F761}" type="datetime1">
               <a:rPr lang="ko-KR" altLang="en-US" smtClean="0"/>
-              <a:t>2026-09-22</a:t>
+              <a:t>2026-10-21</a:t>
             </a:fld>
             <a:endParaRPr lang="ko-KR" altLang="en-US"/>
           </a:p>
@@ -16230,7 +16230,7 @@
           <a:p>
             <a:fld id="{5972FA16-56DC-42C5-8299-62A03231F761}" type="datetime1">
               <a:rPr lang="ko-KR" altLang="en-US" smtClean="0"/>
-              <a:t>2026-09-22</a:t>
+              <a:t>2026-10-21</a:t>
             </a:fld>
             <a:endParaRPr lang="ko-KR" altLang="en-US"/>
           </a:p>
@@ -16586,7 +16586,7 @@
           <a:p>
             <a:fld id="{5972FA16-56DC-42C5-8299-62A03231F761}" type="datetime1">
               <a:rPr lang="ko-KR" altLang="en-US" smtClean="0"/>
-              <a:t>2026-09-22</a:t>
+              <a:t>2026-10-21</a:t>
             </a:fld>
             <a:endParaRPr lang="ko-KR" altLang="en-US"/>
           </a:p>
@@ -17198,7 +17198,7 @@
           <a:p>
             <a:fld id="{5972FA16-56DC-42C5-8299-62A03231F761}" type="datetime1">
               <a:rPr lang="ko-KR" altLang="en-US" smtClean="0"/>
-              <a:t>2026-09-22</a:t>
+              <a:t>2026-10-21</a:t>
             </a:fld>
             <a:endParaRPr lang="ko-KR" altLang="en-US"/>
           </a:p>
@@ -18209,7 +18209,7 @@
           <a:p>
             <a:fld id="{5972FA16-56DC-42C5-8299-62A03231F761}" type="datetime1">
               <a:rPr lang="ko-KR" altLang="en-US" smtClean="0"/>
-              <a:t>2026-09-22</a:t>
+              <a:t>2026-10-21</a:t>
             </a:fld>
             <a:endParaRPr lang="ko-KR" altLang="en-US"/>
           </a:p>
@@ -19808,7 +19808,7 @@
           <a:p>
             <a:fld id="{5972FA16-56DC-42C5-8299-62A03231F761}" type="datetime1">
               <a:rPr lang="ko-KR" altLang="en-US" smtClean="0"/>
-              <a:t>2026-09-22</a:t>
+              <a:t>2026-10-21</a:t>
             </a:fld>
             <a:endParaRPr lang="ko-KR" altLang="en-US"/>
           </a:p>
@@ -20955,7 +20955,7 @@
           <a:p>
             <a:fld id="{1EDCE299-BD43-4BCF-8355-CF484E9A3053}" type="datetime1">
               <a:rPr lang="ko-KR" altLang="en-US" smtClean="0"/>
-              <a:t>2026-09-22</a:t>
+              <a:t>2026-10-21</a:t>
             </a:fld>
             <a:endParaRPr lang="ko-KR" altLang="en-US"/>
           </a:p>
@@ -21232,7 +21232,7 @@
           <a:p>
             <a:fld id="{5972FA16-56DC-42C5-8299-62A03231F761}" type="datetime1">
               <a:rPr lang="ko-KR" altLang="en-US" smtClean="0"/>
-              <a:t>2026-09-22</a:t>
+              <a:t>2026-10-21</a:t>
             </a:fld>
             <a:endParaRPr lang="ko-KR" altLang="en-US"/>
           </a:p>
@@ -21504,7 +21504,7 @@
           <a:p>
             <a:fld id="{5972FA16-56DC-42C5-8299-62A03231F761}" type="datetime1">
               <a:rPr lang="ko-KR" altLang="en-US" smtClean="0"/>
-              <a:t>2026-09-22</a:t>
+              <a:t>2026-10-21</a:t>
             </a:fld>
             <a:endParaRPr lang="ko-KR" altLang="en-US"/>
           </a:p>
@@ -22345,7 +22345,7 @@
           <a:p>
             <a:fld id="{5972FA16-56DC-42C5-8299-62A03231F761}" type="datetime1">
               <a:rPr lang="ko-KR" altLang="en-US" smtClean="0"/>
-              <a:t>2026-09-22</a:t>
+              <a:t>2026-10-21</a:t>
             </a:fld>
             <a:endParaRPr lang="ko-KR" altLang="en-US"/>
           </a:p>
@@ -22643,7 +22643,7 @@
           <a:p>
             <a:fld id="{5972FA16-56DC-42C5-8299-62A03231F761}" type="datetime1">
               <a:rPr lang="ko-KR" altLang="en-US" smtClean="0"/>
-              <a:t>2026-09-22</a:t>
+              <a:t>2026-10-21</a:t>
             </a:fld>
             <a:endParaRPr lang="ko-KR" altLang="en-US"/>
           </a:p>
@@ -26524,7 +26524,7 @@
           <a:p>
             <a:fld id="{ABB4C4F5-BB8F-4185-A285-1182BDFFE680}" type="datetime1">
               <a:rPr lang="ko-KR" altLang="en-US" smtClean="0"/>
-              <a:t>2026-09-22</a:t>
+              <a:t>2026-10-21</a:t>
             </a:fld>
             <a:endParaRPr lang="ko-KR" altLang="en-US"/>
           </a:p>
@@ -26920,7 +26920,7 @@
           <a:p>
             <a:fld id="{5972FA16-56DC-42C5-8299-62A03231F761}" type="datetime1">
               <a:rPr lang="ko-KR" altLang="en-US" smtClean="0"/>
-              <a:t>2026-09-22</a:t>
+              <a:t>2026-10-21</a:t>
             </a:fld>
             <a:endParaRPr lang="ko-KR" altLang="en-US"/>
           </a:p>
@@ -27385,7 +27385,7 @@
           <a:p>
             <a:fld id="{5972FA16-56DC-42C5-8299-62A03231F761}" type="datetime1">
               <a:rPr lang="ko-KR" altLang="en-US" smtClean="0"/>
-              <a:t>2026-09-22</a:t>
+              <a:t>2026-10-21</a:t>
             </a:fld>
             <a:endParaRPr lang="ko-KR" altLang="en-US"/>
           </a:p>
@@ -34660,7 +34660,7 @@
           <a:p>
             <a:fld id="{5972FA16-56DC-42C5-8299-62A03231F761}" type="datetime1">
               <a:rPr lang="ko-KR" altLang="en-US" smtClean="0"/>
-              <a:t>2026-09-22</a:t>
+              <a:t>2026-10-21</a:t>
             </a:fld>
             <a:endParaRPr lang="ko-KR" altLang="en-US"/>
           </a:p>
@@ -35098,7 +35098,7 @@
           <a:p>
             <a:fld id="{5972FA16-56DC-42C5-8299-62A03231F761}" type="datetime1">
               <a:rPr lang="ko-KR" altLang="en-US" smtClean="0"/>
-              <a:t>2026-09-22</a:t>
+              <a:t>2026-10-21</a:t>
             </a:fld>
             <a:endParaRPr lang="ko-KR" altLang="en-US"/>
           </a:p>
@@ -35324,7 +35324,7 @@
           <a:p>
             <a:fld id="{6A14ADAD-AB32-46D0-B90F-5835826F9A25}" type="datetime1">
               <a:rPr lang="ko-KR" altLang="en-US" smtClean="0"/>
-              <a:t>2026-09-22</a:t>
+              <a:t>2026-10-21</a:t>
             </a:fld>
             <a:endParaRPr lang="ko-KR" altLang="en-US"/>
           </a:p>
@@ -35524,15 +35524,7 @@
           <a:p>
             <a:r>
               <a:rPr lang="en-US" altLang="ko-KR" sz="2000" dirty="0"/>
-              <a:t>LLVM provides 108</a:t>
-            </a:r>
-            <a:r>
-              <a:rPr lang="en-US" altLang="ko-KR" sz="2000" baseline="30000" dirty="0"/>
-              <a:t>+</a:t>
-            </a:r>
-            <a:r>
-              <a:rPr lang="en-US" altLang="ko-KR" sz="2000" dirty="0"/>
-              <a:t> Passes </a:t>
+              <a:t>LLVM provides hundreds Passes </a:t>
             </a:r>
             <a:r>
               <a:rPr lang="en-US" altLang="ko-KR" sz="1800" dirty="0">
@@ -35546,7 +35538,7 @@
             <a:pPr lvl="1"/>
             <a:r>
               <a:rPr lang="en-US" altLang="ko-KR" sz="1800" dirty="0"/>
-              <a:t>Analyzers (41)</a:t>
+              <a:t>Analyzers</a:t>
             </a:r>
             <a:r>
               <a:rPr lang="en-US" altLang="ko-KR" sz="2000" dirty="0"/>
@@ -35561,7 +35553,7 @@
             <a:pPr lvl="1"/>
             <a:r>
               <a:rPr lang="en-US" altLang="ko-KR" sz="1800" dirty="0"/>
-              <a:t>Transformers (57)</a:t>
+              <a:t>Transformers </a:t>
             </a:r>
             <a:r>
               <a:rPr lang="en-US" altLang="ko-KR" sz="2000" dirty="0"/>
@@ -35569,22 +35561,14 @@
             </a:r>
             <a:r>
               <a:rPr lang="en-US" altLang="ko-KR" sz="1800" dirty="0"/>
-              <a:t> dead code elimination, function </a:t>
-            </a:r>
-            <a:r>
-              <a:rPr lang="en-US" altLang="ko-KR" sz="1800" dirty="0" err="1"/>
-              <a:t>inlining</a:t>
-            </a:r>
+              <a:t> dead code elimination, function inlining, constant propagation, loop unrolling, etc.</a:t>
+            </a:r>
+          </a:p>
+          <a:p>
+            <a:pPr lvl="1"/>
             <a:r>
               <a:rPr lang="en-US" altLang="ko-KR" sz="1800" dirty="0"/>
-              <a:t>, constant propagation, loop unrolling, etc.</a:t>
-            </a:r>
-          </a:p>
-          <a:p>
-            <a:pPr lvl="1"/>
-            <a:r>
-              <a:rPr lang="en-US" altLang="ko-KR" sz="1800" dirty="0"/>
-              <a:t>Utilities (10)</a:t>
+              <a:t>Utilities</a:t>
             </a:r>
             <a:r>
               <a:rPr lang="en-US" altLang="ko-KR" sz="2000" dirty="0"/>
@@ -35621,7 +35605,7 @@
           <a:p>
             <a:fld id="{CFBB3CFB-505E-4A5C-99AA-BACF9C1949BD}" type="datetime1">
               <a:rPr lang="ko-KR" altLang="en-US" smtClean="0"/>
-              <a:t>2026-09-22</a:t>
+              <a:t>2026-10-21</a:t>
             </a:fld>
             <a:endParaRPr lang="ko-KR" altLang="en-US"/>
           </a:p>
@@ -37448,7 +37432,7 @@
           <a:p>
             <a:fld id="{9224B591-FAE3-4FF9-8AC0-A51260853EB3}" type="datetime1">
               <a:rPr lang="ko-KR" altLang="en-US" smtClean="0"/>
-              <a:t>2026-09-22</a:t>
+              <a:t>2026-10-21</a:t>
             </a:fld>
             <a:endParaRPr lang="ko-KR" altLang="en-US"/>
           </a:p>
@@ -37577,7 +37561,7 @@
           <a:p>
             <a:fld id="{7655FB73-842F-4FB6-B266-27DC623DA568}" type="datetime1">
               <a:rPr lang="ko-KR" altLang="en-US" smtClean="0"/>
-              <a:t>2026-09-22</a:t>
+              <a:t>2026-10-21</a:t>
             </a:fld>
             <a:endParaRPr lang="ko-KR" altLang="en-US"/>
           </a:p>
@@ -39162,7 +39146,7 @@
           <a:p>
             <a:fld id="{CCAB5AAB-17BE-4E17-9571-643E7C3B8464}" type="datetime1">
               <a:rPr lang="ko-KR" altLang="en-US" smtClean="0"/>
-              <a:t>2026-09-22</a:t>
+              <a:t>2026-10-21</a:t>
             </a:fld>
             <a:endParaRPr lang="ko-KR" altLang="en-US"/>
           </a:p>
@@ -43857,7 +43841,7 @@
           <a:p>
             <a:fld id="{4BA1C6A6-2EED-4FEE-B0DE-52C668F8AF84}" type="datetime1">
               <a:rPr lang="ko-KR" altLang="en-US" smtClean="0"/>
-              <a:t>2026-09-22</a:t>
+              <a:t>2026-10-21</a:t>
             </a:fld>
             <a:endParaRPr lang="ko-KR" altLang="en-US"/>
           </a:p>

--- a/3-clang-llvm/lec12-llvm-ir-v5.pptx
+++ b/3-clang-llvm/lec12-llvm-ir-v5.pptx
@@ -249,7 +249,7 @@
           <a:p>
             <a:fld id="{C7FD2924-D280-4505-BAC6-AD9B19A15CC3}" type="datetimeFigureOut">
               <a:rPr lang="ko-KR" altLang="en-US" smtClean="0"/>
-              <a:t>2026-10-21</a:t>
+              <a:t>2026-10-26</a:t>
             </a:fld>
             <a:endParaRPr lang="ko-KR" altLang="en-US"/>
           </a:p>
@@ -964,7 +964,7 @@
           <a:p>
             <a:fld id="{D6A4030A-28C9-4AA6-9564-7355F2F06A57}" type="datetime1">
               <a:rPr lang="ko-KR" altLang="en-US" smtClean="0"/>
-              <a:t>2026-10-21</a:t>
+              <a:t>2026-10-26</a:t>
             </a:fld>
             <a:endParaRPr lang="ko-KR" altLang="en-US"/>
           </a:p>
@@ -1090,7 +1090,7 @@
           <a:p>
             <a:fld id="{93642A64-17FC-4D1B-A4C5-869316C2C141}" type="datetime1">
               <a:rPr lang="ko-KR" altLang="en-US" smtClean="0"/>
-              <a:t>2026-10-21</a:t>
+              <a:t>2026-10-26</a:t>
             </a:fld>
             <a:endParaRPr lang="ko-KR" altLang="en-US"/>
           </a:p>
@@ -1272,7 +1272,7 @@
           <a:p>
             <a:fld id="{1B02FC80-6EA7-47D6-BABE-A62610B56D28}" type="datetime1">
               <a:rPr lang="ko-KR" altLang="en-US" smtClean="0"/>
-              <a:t>2026-10-21</a:t>
+              <a:t>2026-10-26</a:t>
             </a:fld>
             <a:endParaRPr lang="ko-KR" altLang="en-US"/>
           </a:p>
@@ -1534,7 +1534,7 @@
                   </a:prstClr>
                 </a:solidFill>
               </a:rPr>
-              <a:t>2026-10-21</a:t>
+              <a:t>2026-10-26</a:t>
             </a:fld>
             <a:endParaRPr lang="ko-KR" altLang="en-US">
               <a:solidFill>
@@ -1889,7 +1889,7 @@
                   </a:prstClr>
                 </a:solidFill>
               </a:rPr>
-              <a:t>2026-10-21</a:t>
+              <a:t>2026-10-26</a:t>
             </a:fld>
             <a:endParaRPr lang="ko-KR" altLang="en-US">
               <a:solidFill>
@@ -2256,7 +2256,7 @@
                   </a:prstClr>
                 </a:solidFill>
               </a:rPr>
-              <a:t>2026-10-21</a:t>
+              <a:t>2026-10-26</a:t>
             </a:fld>
             <a:endParaRPr lang="ko-KR" altLang="en-US">
               <a:solidFill>
@@ -2454,7 +2454,7 @@
                   </a:prstClr>
                 </a:solidFill>
               </a:rPr>
-              <a:t>2026-10-21</a:t>
+              <a:t>2026-10-26</a:t>
             </a:fld>
             <a:endParaRPr lang="ko-KR" altLang="en-US">
               <a:solidFill>
@@ -2630,7 +2630,7 @@
                   </a:prstClr>
                 </a:solidFill>
               </a:rPr>
-              <a:t>2026-10-21</a:t>
+              <a:t>2026-10-26</a:t>
             </a:fld>
             <a:endParaRPr lang="ko-KR" altLang="en-US">
               <a:solidFill>
@@ -2917,7 +2917,7 @@
                   </a:prstClr>
                 </a:solidFill>
               </a:rPr>
-              <a:t>2026-10-21</a:t>
+              <a:t>2026-10-26</a:t>
             </a:fld>
             <a:endParaRPr lang="en-US" altLang="ko-KR">
               <a:solidFill>
@@ -3144,7 +3144,7 @@
           <a:p>
             <a:fld id="{5972FA16-56DC-42C5-8299-62A03231F761}" type="datetime1">
               <a:rPr lang="ko-KR" altLang="en-US" smtClean="0"/>
-              <a:t>2026-10-21</a:t>
+              <a:t>2026-10-26</a:t>
             </a:fld>
             <a:endParaRPr lang="ko-KR" altLang="en-US"/>
           </a:p>
@@ -3393,7 +3393,7 @@
           <a:p>
             <a:fld id="{D21905B7-D8F1-4AB2-815F-B5764F6CE49F}" type="datetime1">
               <a:rPr lang="ko-KR" altLang="en-US" smtClean="0"/>
-              <a:t>2026-10-21</a:t>
+              <a:t>2026-10-26</a:t>
             </a:fld>
             <a:endParaRPr lang="ko-KR" altLang="en-US"/>
           </a:p>
@@ -3682,7 +3682,7 @@
           <a:p>
             <a:fld id="{8E02A14C-B1E0-4FEF-A05F-72154AB14455}" type="datetime1">
               <a:rPr lang="ko-KR" altLang="en-US" smtClean="0"/>
-              <a:t>2026-10-21</a:t>
+              <a:t>2026-10-26</a:t>
             </a:fld>
             <a:endParaRPr lang="ko-KR" altLang="en-US"/>
           </a:p>
@@ -4105,7 +4105,7 @@
           <a:p>
             <a:fld id="{63886CA7-359E-4B5D-91F3-6B3B9A5EED81}" type="datetime1">
               <a:rPr lang="ko-KR" altLang="en-US" smtClean="0"/>
-              <a:t>2026-10-21</a:t>
+              <a:t>2026-10-26</a:t>
             </a:fld>
             <a:endParaRPr lang="ko-KR" altLang="en-US"/>
           </a:p>
@@ -4226,7 +4226,7 @@
           <a:p>
             <a:fld id="{16882C6A-3284-451C-BFBD-D3E6B47C2A82}" type="datetime1">
               <a:rPr lang="ko-KR" altLang="en-US" smtClean="0"/>
-              <a:t>2026-10-21</a:t>
+              <a:t>2026-10-26</a:t>
             </a:fld>
             <a:endParaRPr lang="ko-KR" altLang="en-US"/>
           </a:p>
@@ -4325,7 +4325,7 @@
           <a:p>
             <a:fld id="{F83C0B8E-6B5C-4492-A32D-82C93727986C}" type="datetime1">
               <a:rPr lang="ko-KR" altLang="en-US" smtClean="0"/>
-              <a:t>2026-10-21</a:t>
+              <a:t>2026-10-26</a:t>
             </a:fld>
             <a:endParaRPr lang="ko-KR" altLang="en-US"/>
           </a:p>
@@ -4604,7 +4604,7 @@
           <a:p>
             <a:fld id="{8973ABBB-793D-4587-9055-908626D07AE3}" type="datetime1">
               <a:rPr lang="ko-KR" altLang="en-US" smtClean="0"/>
-              <a:t>2026-10-21</a:t>
+              <a:t>2026-10-26</a:t>
             </a:fld>
             <a:endParaRPr lang="ko-KR" altLang="en-US"/>
           </a:p>
@@ -4863,7 +4863,7 @@
           <a:p>
             <a:fld id="{163126C1-F9FB-4935-B547-5805BAE95E9E}" type="datetime1">
               <a:rPr lang="ko-KR" altLang="en-US" smtClean="0"/>
-              <a:t>2026-10-21</a:t>
+              <a:t>2026-10-26</a:t>
             </a:fld>
             <a:endParaRPr lang="ko-KR" altLang="en-US"/>
           </a:p>
@@ -5079,7 +5079,7 @@
           <a:p>
             <a:fld id="{5DF68B58-71AB-438A-852A-D262459D036E}" type="datetime1">
               <a:rPr lang="ko-KR" altLang="en-US" smtClean="0"/>
-              <a:t>2026-10-21</a:t>
+              <a:t>2026-10-26</a:t>
             </a:fld>
             <a:endParaRPr lang="ko-KR" altLang="en-US"/>
           </a:p>
@@ -5634,7 +5634,7 @@
                   </a:prstClr>
                 </a:solidFill>
               </a:rPr>
-              <a:t>2026-10-21</a:t>
+              <a:t>2026-10-26</a:t>
             </a:fld>
             <a:endParaRPr lang="ko-KR" altLang="en-US">
               <a:solidFill>
@@ -6230,7 +6230,7 @@
           <a:p>
             <a:fld id="{C6807281-C594-49E1-931C-993FD6DEDE1F}" type="datetime1">
               <a:rPr lang="ko-KR" altLang="en-US" smtClean="0"/>
-              <a:t>2026-10-21</a:t>
+              <a:t>2026-10-26</a:t>
             </a:fld>
             <a:endParaRPr lang="ko-KR" altLang="en-US"/>
           </a:p>
@@ -6502,7 +6502,7 @@
           <a:p>
             <a:fld id="{AADC4C1D-8DC3-44B3-AE55-6B75A33AEA66}" type="datetime1">
               <a:rPr lang="ko-KR" altLang="en-US" smtClean="0"/>
-              <a:t>2026-10-21</a:t>
+              <a:t>2026-10-26</a:t>
             </a:fld>
             <a:endParaRPr lang="ko-KR" altLang="en-US"/>
           </a:p>
@@ -6675,7 +6675,7 @@
           <a:p>
             <a:fld id="{228B81D5-4EB3-4E53-82A3-627CC477DA58}" type="datetime1">
               <a:rPr lang="ko-KR" altLang="en-US" smtClean="0"/>
-              <a:t>2026-10-21</a:t>
+              <a:t>2026-10-26</a:t>
             </a:fld>
             <a:endParaRPr lang="ko-KR" altLang="en-US"/>
           </a:p>
@@ -7624,7 +7624,7 @@
           <a:p>
             <a:fld id="{EBBB10FC-9C7E-448C-BCD2-92836878804D}" type="datetime1">
               <a:rPr lang="ko-KR" altLang="en-US" smtClean="0"/>
-              <a:t>2026-10-21</a:t>
+              <a:t>2026-10-26</a:t>
             </a:fld>
             <a:endParaRPr lang="ko-KR" altLang="en-US"/>
           </a:p>
@@ -8560,7 +8560,7 @@
           <a:p>
             <a:fld id="{361E60C5-5DE2-4F1D-A3CA-2B9C99772244}" type="datetime1">
               <a:rPr lang="ko-KR" altLang="en-US" smtClean="0"/>
-              <a:t>2026-10-21</a:t>
+              <a:t>2026-10-26</a:t>
             </a:fld>
             <a:endParaRPr lang="ko-KR" altLang="en-US"/>
           </a:p>
@@ -9019,7 +9019,7 @@
           <a:p>
             <a:fld id="{D18E14E7-2A19-42D3-9611-ED78C0C865B8}" type="datetime1">
               <a:rPr lang="ko-KR" altLang="en-US" smtClean="0"/>
-              <a:t>2026-10-21</a:t>
+              <a:t>2026-10-26</a:t>
             </a:fld>
             <a:endParaRPr lang="ko-KR" altLang="en-US"/>
           </a:p>
@@ -9280,7 +9280,7 @@
           <a:p>
             <a:fld id="{49D40FD3-2CBF-4CD1-9910-09BECA7471ED}" type="datetime1">
               <a:rPr lang="ko-KR" altLang="en-US" smtClean="0"/>
-              <a:t>2026-10-21</a:t>
+              <a:t>2026-10-26</a:t>
             </a:fld>
             <a:endParaRPr lang="ko-KR" altLang="en-US"/>
           </a:p>
@@ -9519,7 +9519,7 @@
           <a:p>
             <a:fld id="{A52D8E35-5020-4556-B7D5-014EC4FE70CC}" type="datetime1">
               <a:rPr lang="ko-KR" altLang="en-US" smtClean="0"/>
-              <a:t>2026-10-21</a:t>
+              <a:t>2026-10-26</a:t>
             </a:fld>
             <a:endParaRPr lang="ko-KR" altLang="en-US"/>
           </a:p>
@@ -9897,7 +9897,7 @@
           <a:p>
             <a:fld id="{69B23FFF-ADC3-4DBF-AD15-A00414FAE676}" type="datetime1">
               <a:rPr lang="ko-KR" altLang="en-US" smtClean="0"/>
-              <a:t>2026-10-21</a:t>
+              <a:t>2026-10-26</a:t>
             </a:fld>
             <a:endParaRPr lang="ko-KR" altLang="en-US"/>
           </a:p>
@@ -10145,7 +10145,7 @@
           <a:p>
             <a:fld id="{5972FA16-56DC-42C5-8299-62A03231F761}" type="datetime1">
               <a:rPr lang="ko-KR" altLang="en-US" smtClean="0"/>
-              <a:t>2026-10-21</a:t>
+              <a:t>2026-10-26</a:t>
             </a:fld>
             <a:endParaRPr lang="ko-KR" altLang="en-US"/>
           </a:p>
@@ -11354,7 +11354,7 @@
           <a:p>
             <a:fld id="{5972FA16-56DC-42C5-8299-62A03231F761}" type="datetime1">
               <a:rPr lang="ko-KR" altLang="en-US" smtClean="0"/>
-              <a:t>2026-10-21</a:t>
+              <a:t>2026-10-26</a:t>
             </a:fld>
             <a:endParaRPr lang="ko-KR" altLang="en-US"/>
           </a:p>
@@ -13147,7 +13147,7 @@
           <a:p>
             <a:fld id="{AED6A7DB-55D9-4729-85D7-E7D6C30D80C4}" type="datetime1">
               <a:rPr lang="ko-KR" altLang="en-US" smtClean="0"/>
-              <a:t>2026-10-21</a:t>
+              <a:t>2026-10-26</a:t>
             </a:fld>
             <a:endParaRPr lang="ko-KR" altLang="en-US"/>
           </a:p>
@@ -13711,7 +13711,7 @@
           <a:p>
             <a:fld id="{5972FA16-56DC-42C5-8299-62A03231F761}" type="datetime1">
               <a:rPr lang="ko-KR" altLang="en-US" smtClean="0"/>
-              <a:t>2026-10-21</a:t>
+              <a:t>2026-10-26</a:t>
             </a:fld>
             <a:endParaRPr lang="ko-KR" altLang="en-US"/>
           </a:p>
@@ -14698,7 +14698,7 @@
           <a:p>
             <a:fld id="{5972FA16-56DC-42C5-8299-62A03231F761}" type="datetime1">
               <a:rPr lang="ko-KR" altLang="en-US" smtClean="0"/>
-              <a:t>2026-10-21</a:t>
+              <a:t>2026-10-26</a:t>
             </a:fld>
             <a:endParaRPr lang="ko-KR" altLang="en-US"/>
           </a:p>
@@ -15134,7 +15134,7 @@
           <a:p>
             <a:fld id="{5972FA16-56DC-42C5-8299-62A03231F761}" type="datetime1">
               <a:rPr lang="ko-KR" altLang="en-US" smtClean="0"/>
-              <a:t>2026-10-21</a:t>
+              <a:t>2026-10-26</a:t>
             </a:fld>
             <a:endParaRPr lang="ko-KR" altLang="en-US"/>
           </a:p>
@@ -15639,7 +15639,7 @@
           <a:p>
             <a:fld id="{5972FA16-56DC-42C5-8299-62A03231F761}" type="datetime1">
               <a:rPr lang="ko-KR" altLang="en-US" smtClean="0"/>
-              <a:t>2026-10-21</a:t>
+              <a:t>2026-10-26</a:t>
             </a:fld>
             <a:endParaRPr lang="ko-KR" altLang="en-US"/>
           </a:p>
@@ -16006,7 +16006,7 @@
           <a:p>
             <a:fld id="{5972FA16-56DC-42C5-8299-62A03231F761}" type="datetime1">
               <a:rPr lang="ko-KR" altLang="en-US" smtClean="0"/>
-              <a:t>2026-10-21</a:t>
+              <a:t>2026-10-26</a:t>
             </a:fld>
             <a:endParaRPr lang="ko-KR" altLang="en-US"/>
           </a:p>
@@ -16230,7 +16230,7 @@
           <a:p>
             <a:fld id="{5972FA16-56DC-42C5-8299-62A03231F761}" type="datetime1">
               <a:rPr lang="ko-KR" altLang="en-US" smtClean="0"/>
-              <a:t>2026-10-21</a:t>
+              <a:t>2026-10-26</a:t>
             </a:fld>
             <a:endParaRPr lang="ko-KR" altLang="en-US"/>
           </a:p>
@@ -16586,7 +16586,7 @@
           <a:p>
             <a:fld id="{5972FA16-56DC-42C5-8299-62A03231F761}" type="datetime1">
               <a:rPr lang="ko-KR" altLang="en-US" smtClean="0"/>
-              <a:t>2026-10-21</a:t>
+              <a:t>2026-10-26</a:t>
             </a:fld>
             <a:endParaRPr lang="ko-KR" altLang="en-US"/>
           </a:p>
@@ -17198,7 +17198,7 @@
           <a:p>
             <a:fld id="{5972FA16-56DC-42C5-8299-62A03231F761}" type="datetime1">
               <a:rPr lang="ko-KR" altLang="en-US" smtClean="0"/>
-              <a:t>2026-10-21</a:t>
+              <a:t>2026-10-26</a:t>
             </a:fld>
             <a:endParaRPr lang="ko-KR" altLang="en-US"/>
           </a:p>
@@ -18209,7 +18209,7 @@
           <a:p>
             <a:fld id="{5972FA16-56DC-42C5-8299-62A03231F761}" type="datetime1">
               <a:rPr lang="ko-KR" altLang="en-US" smtClean="0"/>
-              <a:t>2026-10-21</a:t>
+              <a:t>2026-10-26</a:t>
             </a:fld>
             <a:endParaRPr lang="ko-KR" altLang="en-US"/>
           </a:p>
@@ -19808,7 +19808,7 @@
           <a:p>
             <a:fld id="{5972FA16-56DC-42C5-8299-62A03231F761}" type="datetime1">
               <a:rPr lang="ko-KR" altLang="en-US" smtClean="0"/>
-              <a:t>2026-10-21</a:t>
+              <a:t>2026-10-26</a:t>
             </a:fld>
             <a:endParaRPr lang="ko-KR" altLang="en-US"/>
           </a:p>
@@ -20955,7 +20955,7 @@
           <a:p>
             <a:fld id="{1EDCE299-BD43-4BCF-8355-CF484E9A3053}" type="datetime1">
               <a:rPr lang="ko-KR" altLang="en-US" smtClean="0"/>
-              <a:t>2026-10-21</a:t>
+              <a:t>2026-10-26</a:t>
             </a:fld>
             <a:endParaRPr lang="ko-KR" altLang="en-US"/>
           </a:p>
@@ -21232,7 +21232,7 @@
           <a:p>
             <a:fld id="{5972FA16-56DC-42C5-8299-62A03231F761}" type="datetime1">
               <a:rPr lang="ko-KR" altLang="en-US" smtClean="0"/>
-              <a:t>2026-10-21</a:t>
+              <a:t>2026-10-26</a:t>
             </a:fld>
             <a:endParaRPr lang="ko-KR" altLang="en-US"/>
           </a:p>
@@ -21504,7 +21504,7 @@
           <a:p>
             <a:fld id="{5972FA16-56DC-42C5-8299-62A03231F761}" type="datetime1">
               <a:rPr lang="ko-KR" altLang="en-US" smtClean="0"/>
-              <a:t>2026-10-21</a:t>
+              <a:t>2026-10-26</a:t>
             </a:fld>
             <a:endParaRPr lang="ko-KR" altLang="en-US"/>
           </a:p>
@@ -22345,7 +22345,7 @@
           <a:p>
             <a:fld id="{5972FA16-56DC-42C5-8299-62A03231F761}" type="datetime1">
               <a:rPr lang="ko-KR" altLang="en-US" smtClean="0"/>
-              <a:t>2026-10-21</a:t>
+              <a:t>2026-10-26</a:t>
             </a:fld>
             <a:endParaRPr lang="ko-KR" altLang="en-US"/>
           </a:p>
@@ -22643,7 +22643,7 @@
           <a:p>
             <a:fld id="{5972FA16-56DC-42C5-8299-62A03231F761}" type="datetime1">
               <a:rPr lang="ko-KR" altLang="en-US" smtClean="0"/>
-              <a:t>2026-10-21</a:t>
+              <a:t>2026-10-26</a:t>
             </a:fld>
             <a:endParaRPr lang="ko-KR" altLang="en-US"/>
           </a:p>
@@ -26524,7 +26524,7 @@
           <a:p>
             <a:fld id="{ABB4C4F5-BB8F-4185-A285-1182BDFFE680}" type="datetime1">
               <a:rPr lang="ko-KR" altLang="en-US" smtClean="0"/>
-              <a:t>2026-10-21</a:t>
+              <a:t>2026-10-26</a:t>
             </a:fld>
             <a:endParaRPr lang="ko-KR" altLang="en-US"/>
           </a:p>
@@ -26920,7 +26920,7 @@
           <a:p>
             <a:fld id="{5972FA16-56DC-42C5-8299-62A03231F761}" type="datetime1">
               <a:rPr lang="ko-KR" altLang="en-US" smtClean="0"/>
-              <a:t>2026-10-21</a:t>
+              <a:t>2026-10-26</a:t>
             </a:fld>
             <a:endParaRPr lang="ko-KR" altLang="en-US"/>
           </a:p>
@@ -27385,7 +27385,7 @@
           <a:p>
             <a:fld id="{5972FA16-56DC-42C5-8299-62A03231F761}" type="datetime1">
               <a:rPr lang="ko-KR" altLang="en-US" smtClean="0"/>
-              <a:t>2026-10-21</a:t>
+              <a:t>2026-10-26</a:t>
             </a:fld>
             <a:endParaRPr lang="ko-KR" altLang="en-US"/>
           </a:p>
@@ -32534,7 +32534,7 @@
         </p:nvSpPr>
         <p:spPr>
           <a:xfrm>
-            <a:off x="4504816" y="1178349"/>
+            <a:off x="4355976" y="1150576"/>
             <a:ext cx="4746591" cy="4524315"/>
           </a:xfrm>
           <a:prstGeom prst="rect">
@@ -32870,6 +32870,13 @@
               </a:rPr>
               <a:t>getelementptr</a:t>
             </a:r>
+            <a:r>
+              <a:rPr lang="en-US" altLang="ko-KR" sz="1600" dirty="0">
+                <a:latin typeface="Courier New" panose="02070309020205020404" pitchFamily="49" charset="0"/>
+                <a:cs typeface="Courier New" panose="02070309020205020404" pitchFamily="49" charset="0"/>
+              </a:rPr>
+              <a:t> // s[1]</a:t>
+            </a:r>
             <a:br>
               <a:rPr lang="en-US" altLang="ko-KR" sz="1600" dirty="0">
                 <a:latin typeface="Courier New" panose="02070309020205020404" pitchFamily="49" charset="0"/>
@@ -32964,10 +32971,13 @@
               </a:rPr>
               <a:t>getelementptr</a:t>
             </a:r>
-            <a:endParaRPr lang="en-US" altLang="ko-KR" sz="1600" dirty="0">
-              <a:latin typeface="Courier New" panose="02070309020205020404" pitchFamily="49" charset="0"/>
-              <a:cs typeface="Courier New" panose="02070309020205020404" pitchFamily="49" charset="0"/>
-            </a:endParaRPr>
+            <a:r>
+              <a:rPr lang="en-US" altLang="ko-KR" sz="1600" dirty="0">
+                <a:latin typeface="Courier New" panose="02070309020205020404" pitchFamily="49" charset="0"/>
+                <a:cs typeface="Courier New" panose="02070309020205020404" pitchFamily="49" charset="0"/>
+              </a:rPr>
+              <a:t> // s[1].Z</a:t>
+            </a:r>
           </a:p>
           <a:p>
             <a:r>
@@ -33077,10 +33087,13 @@
               </a:rPr>
               <a:t>getelementptr</a:t>
             </a:r>
-            <a:endParaRPr lang="en-US" altLang="ko-KR" sz="1600" dirty="0">
-              <a:latin typeface="Courier New" panose="02070309020205020404" pitchFamily="49" charset="0"/>
-              <a:cs typeface="Courier New" panose="02070309020205020404" pitchFamily="49" charset="0"/>
-            </a:endParaRPr>
+            <a:r>
+              <a:rPr lang="en-US" altLang="ko-KR" sz="1600" dirty="0">
+                <a:latin typeface="Courier New" panose="02070309020205020404" pitchFamily="49" charset="0"/>
+                <a:cs typeface="Courier New" panose="02070309020205020404" pitchFamily="49" charset="0"/>
+              </a:rPr>
+              <a:t> // s[1].Z.B</a:t>
+            </a:r>
           </a:p>
           <a:p>
             <a:r>
@@ -33200,10 +33213,13 @@
               </a:rPr>
               <a:t>getelementptr</a:t>
             </a:r>
-            <a:endParaRPr lang="en-US" altLang="ko-KR" sz="1600" dirty="0">
-              <a:latin typeface="Courier New" panose="02070309020205020404" pitchFamily="49" charset="0"/>
-              <a:cs typeface="Courier New" panose="02070309020205020404" pitchFamily="49" charset="0"/>
-            </a:endParaRPr>
+            <a:r>
+              <a:rPr lang="en-US" altLang="ko-KR" sz="1600" dirty="0">
+                <a:latin typeface="Courier New" panose="02070309020205020404" pitchFamily="49" charset="0"/>
+                <a:cs typeface="Courier New" panose="02070309020205020404" pitchFamily="49" charset="0"/>
+              </a:rPr>
+              <a:t> //s[1].Z.B[5][13]</a:t>
+            </a:r>
           </a:p>
           <a:p>
             <a:r>
@@ -33400,7 +33416,7 @@
         </p:nvSpPr>
         <p:spPr>
           <a:xfrm>
-            <a:off x="4194557" y="1178349"/>
+            <a:off x="4139952" y="1178349"/>
             <a:ext cx="581490" cy="4524315"/>
           </a:xfrm>
           <a:prstGeom prst="rect">
@@ -33702,8 +33718,8 @@
         </p:nvSpPr>
         <p:spPr>
           <a:xfrm>
-            <a:off x="661435" y="1243606"/>
-            <a:ext cx="3354423" cy="3662541"/>
+            <a:off x="611560" y="1243606"/>
+            <a:ext cx="3533122" cy="3539430"/>
           </a:xfrm>
           <a:prstGeom prst="rect">
             <a:avLst/>
@@ -34091,7 +34107,7 @@
                 <a:latin typeface="Courier New" panose="02070309020205020404" pitchFamily="49" charset="0"/>
                 <a:cs typeface="Courier New" panose="02070309020205020404" pitchFamily="49" charset="0"/>
               </a:rPr>
-              <a:t> &amp;s[1].Z.B[5][13];</a:t>
+              <a:t> &amp;(s[1].Z.B[5][13]);</a:t>
             </a:r>
           </a:p>
           <a:p>
@@ -34125,7 +34141,7 @@
         </p:nvSpPr>
         <p:spPr>
           <a:xfrm>
-            <a:off x="187655" y="1243606"/>
+            <a:off x="179512" y="1243606"/>
             <a:ext cx="521757" cy="3662541"/>
           </a:xfrm>
           <a:prstGeom prst="rect">
@@ -34660,7 +34676,7 @@
           <a:p>
             <a:fld id="{5972FA16-56DC-42C5-8299-62A03231F761}" type="datetime1">
               <a:rPr lang="ko-KR" altLang="en-US" smtClean="0"/>
-              <a:t>2026-10-21</a:t>
+              <a:t>2026-10-26</a:t>
             </a:fld>
             <a:endParaRPr lang="ko-KR" altLang="en-US"/>
           </a:p>
@@ -35098,7 +35114,7 @@
           <a:p>
             <a:fld id="{5972FA16-56DC-42C5-8299-62A03231F761}" type="datetime1">
               <a:rPr lang="ko-KR" altLang="en-US" smtClean="0"/>
-              <a:t>2026-10-21</a:t>
+              <a:t>2026-10-26</a:t>
             </a:fld>
             <a:endParaRPr lang="ko-KR" altLang="en-US"/>
           </a:p>
@@ -35324,7 +35340,7 @@
           <a:p>
             <a:fld id="{6A14ADAD-AB32-46D0-B90F-5835826F9A25}" type="datetime1">
               <a:rPr lang="ko-KR" altLang="en-US" smtClean="0"/>
-              <a:t>2026-10-21</a:t>
+              <a:t>2026-10-26</a:t>
             </a:fld>
             <a:endParaRPr lang="ko-KR" altLang="en-US"/>
           </a:p>
@@ -35605,7 +35621,7 @@
           <a:p>
             <a:fld id="{CFBB3CFB-505E-4A5C-99AA-BACF9C1949BD}" type="datetime1">
               <a:rPr lang="ko-KR" altLang="en-US" smtClean="0"/>
-              <a:t>2026-10-21</a:t>
+              <a:t>2026-10-26</a:t>
             </a:fld>
             <a:endParaRPr lang="ko-KR" altLang="en-US"/>
           </a:p>
@@ -37432,7 +37448,7 @@
           <a:p>
             <a:fld id="{9224B591-FAE3-4FF9-8AC0-A51260853EB3}" type="datetime1">
               <a:rPr lang="ko-KR" altLang="en-US" smtClean="0"/>
-              <a:t>2026-10-21</a:t>
+              <a:t>2026-10-26</a:t>
             </a:fld>
             <a:endParaRPr lang="ko-KR" altLang="en-US"/>
           </a:p>
@@ -37561,7 +37577,7 @@
           <a:p>
             <a:fld id="{7655FB73-842F-4FB6-B266-27DC623DA568}" type="datetime1">
               <a:rPr lang="ko-KR" altLang="en-US" smtClean="0"/>
-              <a:t>2026-10-21</a:t>
+              <a:t>2026-10-26</a:t>
             </a:fld>
             <a:endParaRPr lang="ko-KR" altLang="en-US"/>
           </a:p>
@@ -39146,7 +39162,7 @@
           <a:p>
             <a:fld id="{CCAB5AAB-17BE-4E17-9571-643E7C3B8464}" type="datetime1">
               <a:rPr lang="ko-KR" altLang="en-US" smtClean="0"/>
-              <a:t>2026-10-21</a:t>
+              <a:t>2026-10-26</a:t>
             </a:fld>
             <a:endParaRPr lang="ko-KR" altLang="en-US"/>
           </a:p>
@@ -43841,7 +43857,7 @@
           <a:p>
             <a:fld id="{4BA1C6A6-2EED-4FEE-B0DE-52C668F8AF84}" type="datetime1">
               <a:rPr lang="ko-KR" altLang="en-US" smtClean="0"/>
-              <a:t>2026-10-21</a:t>
+              <a:t>2026-10-26</a:t>
             </a:fld>
             <a:endParaRPr lang="ko-KR" altLang="en-US"/>
           </a:p>
